--- a/docs/方案PPT.pptx
+++ b/docs/方案PPT.pptx
@@ -3819,7 +3819,7 @@
               </a:spcAft>
             </a:pPr>
             <a:r>
-              <a:rPr sz="1150" b="0">
+              <a:rPr sz="1200" b="0">
                 <a:solidFill>
                   <a:srgbClr val="A99C8B"/>
                 </a:solidFill>
@@ -4038,7 +4038,7 @@
               </a:spcAft>
             </a:pPr>
             <a:r>
-              <a:rPr sz="1150" b="0">
+              <a:rPr sz="1200" b="0">
                 <a:solidFill>
                   <a:srgbClr val="A99C8B"/>
                 </a:solidFill>
@@ -4257,7 +4257,7 @@
               </a:spcAft>
             </a:pPr>
             <a:r>
-              <a:rPr sz="1150" b="0">
+              <a:rPr sz="1200" b="0">
                 <a:solidFill>
                   <a:srgbClr val="A99C8B"/>
                 </a:solidFill>
@@ -4476,7 +4476,7 @@
               </a:spcAft>
             </a:pPr>
             <a:r>
-              <a:rPr sz="1150" b="0">
+              <a:rPr sz="1200" b="0">
                 <a:solidFill>
                   <a:srgbClr val="A99C8B"/>
                 </a:solidFill>
@@ -4597,7 +4597,7 @@
               </a:lnSpc>
             </a:pPr>
             <a:r>
-              <a:rPr sz="1050" b="0">
+              <a:rPr sz="1100" b="0">
                 <a:solidFill>
                   <a:srgbClr val="A99C8B"/>
                 </a:solidFill>
@@ -4718,7 +4718,7 @@
               </a:lnSpc>
             </a:pPr>
             <a:r>
-              <a:rPr sz="1050" b="0">
+              <a:rPr sz="1100" b="0">
                 <a:solidFill>
                   <a:srgbClr val="A99C8B"/>
                 </a:solidFill>
@@ -4839,7 +4839,7 @@
               </a:lnSpc>
             </a:pPr>
             <a:r>
-              <a:rPr sz="1050" b="0">
+              <a:rPr sz="1100" b="0">
                 <a:solidFill>
                   <a:srgbClr val="A99C8B"/>
                 </a:solidFill>
@@ -4960,7 +4960,7 @@
               </a:lnSpc>
             </a:pPr>
             <a:r>
-              <a:rPr sz="1050" b="0">
+              <a:rPr sz="1100" b="0">
                 <a:solidFill>
                   <a:srgbClr val="A99C8B"/>
                 </a:solidFill>
@@ -8041,7 +8041,7 @@
               </a:lnSpc>
             </a:pPr>
             <a:r>
-              <a:rPr sz="1000" b="0">
+              <a:rPr sz="1050" b="0">
                 <a:solidFill>
                   <a:srgbClr val="A99C8B"/>
                 </a:solidFill>
@@ -8250,7 +8250,7 @@
               </a:lnSpc>
             </a:pPr>
             <a:r>
-              <a:rPr sz="1000" b="0">
+              <a:rPr sz="1050" b="0">
                 <a:solidFill>
                   <a:srgbClr val="A99C8B"/>
                 </a:solidFill>
@@ -8459,7 +8459,7 @@
               </a:lnSpc>
             </a:pPr>
             <a:r>
-              <a:rPr sz="1000" b="0">
+              <a:rPr sz="1050" b="0">
                 <a:solidFill>
                   <a:srgbClr val="A99C8B"/>
                 </a:solidFill>
@@ -8668,7 +8668,7 @@
               </a:lnSpc>
             </a:pPr>
             <a:r>
-              <a:rPr sz="1000" b="0">
+              <a:rPr sz="1050" b="0">
                 <a:solidFill>
                   <a:srgbClr val="A99C8B"/>
                 </a:solidFill>
@@ -8939,7 +8939,7 @@
               </a:lnSpc>
             </a:pPr>
             <a:r>
-              <a:rPr sz="1000" b="0">
+              <a:rPr sz="1050" b="0">
                 <a:solidFill>
                   <a:srgbClr val="A99C8B"/>
                 </a:solidFill>
@@ -9148,7 +9148,7 @@
               </a:lnSpc>
             </a:pPr>
             <a:r>
-              <a:rPr sz="1000" b="0">
+              <a:rPr sz="1050" b="0">
                 <a:solidFill>
                   <a:srgbClr val="A99C8B"/>
                 </a:solidFill>
@@ -9357,7 +9357,7 @@
               </a:lnSpc>
             </a:pPr>
             <a:r>
-              <a:rPr sz="1000" b="0">
+              <a:rPr sz="1050" b="0">
                 <a:solidFill>
                   <a:srgbClr val="A99C8B"/>
                 </a:solidFill>
@@ -9566,7 +9566,7 @@
               </a:lnSpc>
             </a:pPr>
             <a:r>
-              <a:rPr sz="1000" b="0">
+              <a:rPr sz="1050" b="0">
                 <a:solidFill>
                   <a:srgbClr val="A99C8B"/>
                 </a:solidFill>
@@ -10911,7 +10911,7 @@
               </a:lnSpc>
             </a:pPr>
             <a:r>
-              <a:rPr sz="950" b="1">
+              <a:rPr sz="1000" b="1">
                 <a:solidFill>
                   <a:srgbClr val="17110C"/>
                 </a:solidFill>
@@ -11076,7 +11076,7 @@
               </a:lnSpc>
             </a:pPr>
             <a:r>
-              <a:rPr sz="1050" b="0">
+              <a:rPr sz="1100" b="0">
                 <a:solidFill>
                   <a:srgbClr val="A99C8B"/>
                 </a:solidFill>
@@ -11136,7 +11136,7 @@
               </a:lnSpc>
             </a:pPr>
             <a:r>
-              <a:rPr sz="950" b="1">
+              <a:rPr sz="1000" b="1">
                 <a:solidFill>
                   <a:srgbClr val="17110C"/>
                 </a:solidFill>
@@ -11301,7 +11301,7 @@
               </a:lnSpc>
             </a:pPr>
             <a:r>
-              <a:rPr sz="1050" b="0">
+              <a:rPr sz="1100" b="0">
                 <a:solidFill>
                   <a:srgbClr val="A99C8B"/>
                 </a:solidFill>
@@ -11361,7 +11361,7 @@
               </a:lnSpc>
             </a:pPr>
             <a:r>
-              <a:rPr sz="950" b="1">
+              <a:rPr sz="1000" b="1">
                 <a:solidFill>
                   <a:srgbClr val="17110C"/>
                 </a:solidFill>
@@ -11526,7 +11526,7 @@
               </a:lnSpc>
             </a:pPr>
             <a:r>
-              <a:rPr sz="1050" b="0">
+              <a:rPr sz="1100" b="0">
                 <a:solidFill>
                   <a:srgbClr val="A99C8B"/>
                 </a:solidFill>
@@ -11586,7 +11586,7 @@
               </a:lnSpc>
             </a:pPr>
             <a:r>
-              <a:rPr sz="950" b="1">
+              <a:rPr sz="1000" b="1">
                 <a:solidFill>
                   <a:srgbClr val="17110C"/>
                 </a:solidFill>
@@ -11794,7 +11794,7 @@
               </a:lnSpc>
             </a:pPr>
             <a:r>
-              <a:rPr sz="950" b="1">
+              <a:rPr sz="1000" b="1">
                 <a:solidFill>
                   <a:srgbClr val="17110C"/>
                 </a:solidFill>
@@ -12406,7 +12406,7 @@
               </a:lnSpc>
             </a:pPr>
             <a:r>
-              <a:rPr sz="950" b="0">
+              <a:rPr sz="1050" b="0">
                 <a:solidFill>
                   <a:srgbClr val="A99C8B"/>
                 </a:solidFill>
@@ -12527,7 +12527,7 @@
               </a:lnSpc>
             </a:pPr>
             <a:r>
-              <a:rPr sz="950" b="0">
+              <a:rPr sz="1050" b="0">
                 <a:solidFill>
                   <a:srgbClr val="A99C8B"/>
                 </a:solidFill>
